--- a/assets/pptx/catalog-54.pptx
+++ b/assets/pptx/catalog-54.pptx
@@ -3248,7 +3248,7 @@
                 <a:ea typeface="Ebrima"/>
                 <a:cs typeface="Ebrima"/>
               </a:rPr>
-              <a:t>መዳኛ ነህ መዳኛ (2x)</a:t>
+              <a:t>መዳኛ ነህ መዳኛ 2x</a:t>
             </a:r>
           </a:p>
           <a:p>
@@ -3302,7 +3302,7 @@
                 <a:ea typeface="Ebrima"/>
                 <a:cs typeface="Ebrima"/>
               </a:rPr>
-              <a:t>አባቴ ነህ አባቴ (2x)</a:t>
+              <a:t>አባቴ ነህ አባቴ 2x</a:t>
             </a:r>
           </a:p>
           <a:p>
@@ -3338,7 +3338,7 @@
                 <a:ea typeface="Ebrima"/>
                 <a:cs typeface="Ebrima"/>
               </a:rPr>
-              <a:t>አባቴ ነህ አባቴ (2x)</a:t>
+              <a:t>አባቴ ነህ አባቴ 2x</a:t>
             </a:r>
           </a:p>
         </p:txBody>
@@ -3423,7 +3423,7 @@
                 <a:ea typeface="Ebrima"/>
                 <a:cs typeface="Ebrima"/>
               </a:rPr>
-              <a:t>አገልጋይ እንዲሆን ለረጅም ዓመት (2x)</a:t>
+              <a:t>አገልጋይ እንዲሆን ለረጅም ዓመት 2x</a:t>
             </a:r>
           </a:p>
           <a:p>
@@ -3459,7 +3459,7 @@
                 <a:ea typeface="Ebrima"/>
                 <a:cs typeface="Ebrima"/>
               </a:rPr>
-              <a:t>በሀሰት ወንጅለው ከወይኒ ጣሉት (2x)</a:t>
+              <a:t>በሀሰት ወንጅለው ከወይኒ ጣሉት 2x</a:t>
             </a:r>
           </a:p>
         </p:txBody>
@@ -3544,7 +3544,7 @@
                 <a:ea typeface="Ebrima"/>
                 <a:cs typeface="Ebrima"/>
               </a:rPr>
-              <a:t>ህልሙ እውን ሆነ ወጣ በመምበሩ (2x)</a:t>
+              <a:t>ህልሙ እውን ሆነ ወጣ በመምበሩ 2x</a:t>
             </a:r>
           </a:p>
           <a:p>
@@ -3580,7 +3580,7 @@
                 <a:ea typeface="Ebrima"/>
                 <a:cs typeface="Ebrima"/>
               </a:rPr>
-              <a:t>መሆኑ አይቀርም ተፅዕኖ ፈጣሪ (2x)</a:t>
+              <a:t>መሆኑ አይቀርም ተፅዕኖ ፈጣሪ 2x</a:t>
             </a:r>
           </a:p>
         </p:txBody>
@@ -3665,7 +3665,7 @@
                 <a:ea typeface="Ebrima"/>
                 <a:cs typeface="Ebrima"/>
               </a:rPr>
-              <a:t>የታሰረን የምትፈታ የደህንነት ጌታ (2x)</a:t>
+              <a:t>የታሰረን የምትፈታ የደህንነት ጌታ 2x</a:t>
             </a:r>
           </a:p>
         </p:txBody>
@@ -3732,7 +3732,7 @@
                 <a:ea typeface="Ebrima"/>
                 <a:cs typeface="Ebrima"/>
               </a:rPr>
-              <a:t>መዳኛ ነህ መዳኛ (2x)</a:t>
+              <a:t>መዳኛ ነህ መዳኛ 2x</a:t>
             </a:r>
           </a:p>
           <a:p>
@@ -3786,7 +3786,7 @@
                 <a:ea typeface="Ebrima"/>
                 <a:cs typeface="Ebrima"/>
               </a:rPr>
-              <a:t>አባቴ ነህ አባቴ (2x)</a:t>
+              <a:t>አባቴ ነህ አባቴ 2x</a:t>
             </a:r>
           </a:p>
           <a:p>
@@ -3822,7 +3822,7 @@
                 <a:ea typeface="Ebrima"/>
                 <a:cs typeface="Ebrima"/>
               </a:rPr>
-              <a:t>አባቴ ነህ አባቴ (2x)</a:t>
+              <a:t>አባቴ ነህ አባቴ 2x</a:t>
             </a:r>
           </a:p>
         </p:txBody>
@@ -4028,7 +4028,7 @@
                 <a:ea typeface="Ebrima"/>
                 <a:cs typeface="Ebrima"/>
               </a:rPr>
-              <a:t>ደመናን አዞልኝ ጥላ አደረገልኝ (2x)</a:t>
+              <a:t>ደመናን አዞልኝ ጥላ አደረገልኝ 2x</a:t>
             </a:r>
           </a:p>
           <a:p>
@@ -4064,7 +4064,7 @@
                 <a:ea typeface="Ebrima"/>
                 <a:cs typeface="Ebrima"/>
               </a:rPr>
-              <a:t>ከፊቴ እየወጣ እረጋገጠልኝ (2x)</a:t>
+              <a:t>ከፊቴ እየወጣ እረጋገጠልኝ 2x</a:t>
             </a:r>
           </a:p>
         </p:txBody>
@@ -4131,7 +4131,7 @@
                 <a:ea typeface="Ebrima"/>
                 <a:cs typeface="Ebrima"/>
               </a:rPr>
-              <a:t>መዳኛ ነህ መዳኛ (2x)</a:t>
+              <a:t>መዳኛ ነህ መዳኛ 2x</a:t>
             </a:r>
           </a:p>
           <a:p>
@@ -4185,7 +4185,7 @@
                 <a:ea typeface="Ebrima"/>
                 <a:cs typeface="Ebrima"/>
               </a:rPr>
-              <a:t>አባቴ ነህ አባቴ (2x)</a:t>
+              <a:t>አባቴ ነህ አባቴ 2x</a:t>
             </a:r>
           </a:p>
           <a:p>
@@ -4221,7 +4221,7 @@
                 <a:ea typeface="Ebrima"/>
                 <a:cs typeface="Ebrima"/>
               </a:rPr>
-              <a:t>አባቴ ነህ አባቴ (2x)</a:t>
+              <a:t>አባቴ ነህ አባቴ 2x</a:t>
             </a:r>
           </a:p>
         </p:txBody>
